--- a/Fashion E-Commerce Analysis/Fashion_E-Commerce_Analysis_Report.pptx
+++ b/Fashion E-Commerce Analysis/Fashion_E-Commerce_Analysis_Report.pptx
@@ -5380,7 +5380,7 @@
                   <a:bodyPr/>
                   <a:lstStyle/>
                   <a:p>
-                    <a:fld id="{0DC445BE-68E5-4D0D-8D64-5667BF32A2B9}" type="CELLRANGE">
+                    <a:fld id="{A10ED5D5-C71C-4197-93DB-1E342FE86D0B}" type="CELLRANGE">
                       <a:rPr lang="en-US"/>
                       <a:pPr/>
                       <a:t>[CELLRANGE]</a:t>
@@ -5413,7 +5413,7 @@
                   <a:bodyPr/>
                   <a:lstStyle/>
                   <a:p>
-                    <a:fld id="{50E7095F-E032-45A0-B957-C0B5CF329760}" type="CELLRANGE">
+                    <a:fld id="{04ECEDB4-9638-4531-A888-3FE13977CEC1}" type="CELLRANGE">
                       <a:rPr lang="en-ID"/>
                       <a:pPr/>
                       <a:t>[CELLRANGE]</a:t>
@@ -5447,7 +5447,7 @@
                   <a:bodyPr/>
                   <a:lstStyle/>
                   <a:p>
-                    <a:fld id="{DAEBABE4-2D9A-411E-A9A9-7B1464FE936E}" type="CELLRANGE">
+                    <a:fld id="{622B9F0C-8A02-46DC-BE35-7E09ADDB6A8F}" type="CELLRANGE">
                       <a:rPr lang="en-ID"/>
                       <a:pPr/>
                       <a:t>[CELLRANGE]</a:t>
@@ -5481,7 +5481,7 @@
                   <a:bodyPr/>
                   <a:lstStyle/>
                   <a:p>
-                    <a:fld id="{BCC0E7F4-2710-4A49-92DD-30EE2AADB68D}" type="CELLRANGE">
+                    <a:fld id="{C8A04130-7184-4ADB-ABC1-039C4E534BBA}" type="CELLRANGE">
                       <a:rPr lang="en-ID"/>
                       <a:pPr/>
                       <a:t>[CELLRANGE]</a:t>
@@ -5515,7 +5515,7 @@
                   <a:bodyPr/>
                   <a:lstStyle/>
                   <a:p>
-                    <a:fld id="{B6FE13FE-18A0-4B27-A827-B8752EF0D85C}" type="CELLRANGE">
+                    <a:fld id="{F390AFB4-D7DB-4859-BA59-51D66F59EE46}" type="CELLRANGE">
                       <a:rPr lang="en-ID"/>
                       <a:pPr/>
                       <a:t>[CELLRANGE]</a:t>
@@ -19077,6 +19077,18 @@
   <p:clrMapOvr>
     <a:masterClrMapping/>
   </p:clrMapOvr>
+  <mc:AlternateContent xmlns:mc="http://schemas.openxmlformats.org/markup-compatibility/2006">
+    <mc:Choice xmlns:p159="http://schemas.microsoft.com/office/powerpoint/2015/09/main" Requires="p159">
+      <p:transition xmlns:p14="http://schemas.microsoft.com/office/powerpoint/2010/main" spd="slow" p14:dur="2000">
+        <p159:morph option="byObject"/>
+      </p:transition>
+    </mc:Choice>
+    <mc:Fallback>
+      <p:transition spd="slow">
+        <p:fade/>
+      </p:transition>
+    </mc:Fallback>
+  </mc:AlternateContent>
 </p:sld>
 </file>
 
@@ -19305,6 +19317,18 @@
   <p:clrMapOvr>
     <a:masterClrMapping/>
   </p:clrMapOvr>
+  <mc:AlternateContent xmlns:mc="http://schemas.openxmlformats.org/markup-compatibility/2006">
+    <mc:Choice xmlns:p14="http://schemas.microsoft.com/office/powerpoint/2010/main" Requires="p14">
+      <p:transition spd="slow" p14:dur="1500">
+        <p:split orient="vert"/>
+      </p:transition>
+    </mc:Choice>
+    <mc:Fallback>
+      <p:transition spd="slow">
+        <p:split orient="vert"/>
+      </p:transition>
+    </mc:Fallback>
+  </mc:AlternateContent>
 </p:sld>
 </file>
 
@@ -19572,6 +19596,9 @@
   <p:clrMapOvr>
     <a:masterClrMapping/>
   </p:clrMapOvr>
+  <p:transition spd="slow">
+    <p:wipe/>
+  </p:transition>
 </p:sld>
 </file>
 
@@ -19946,6 +19973,18 @@
   <p:clrMapOvr>
     <a:masterClrMapping/>
   </p:clrMapOvr>
+  <mc:AlternateContent xmlns:mc="http://schemas.openxmlformats.org/markup-compatibility/2006">
+    <mc:Choice xmlns:p14="http://schemas.microsoft.com/office/powerpoint/2010/main" Requires="p14">
+      <p:transition spd="slow" p14:dur="2000">
+        <p14:ferris dir="l"/>
+      </p:transition>
+    </mc:Choice>
+    <mc:Fallback>
+      <p:transition spd="slow">
+        <p:fade/>
+      </p:transition>
+    </mc:Fallback>
+  </mc:AlternateContent>
 </p:sld>
 </file>
 
@@ -20148,6 +20187,18 @@
   <p:clrMapOvr>
     <a:masterClrMapping/>
   </p:clrMapOvr>
+  <mc:AlternateContent xmlns:mc="http://schemas.openxmlformats.org/markup-compatibility/2006">
+    <mc:Choice xmlns:p14="http://schemas.microsoft.com/office/powerpoint/2010/main" Requires="p14">
+      <p:transition p14:dur="250">
+        <p14:warp dir="in"/>
+      </p:transition>
+    </mc:Choice>
+    <mc:Fallback>
+      <p:transition>
+        <p:fade/>
+      </p:transition>
+    </mc:Fallback>
+  </mc:AlternateContent>
 </p:sld>
 </file>
 
@@ -20467,6 +20518,9 @@
   <p:clrMapOvr>
     <a:masterClrMapping/>
   </p:clrMapOvr>
+  <p:transition spd="slow">
+    <p:push dir="u"/>
+  </p:transition>
 </p:sld>
 </file>
 
@@ -20633,6 +20687,9 @@
   <p:clrMapOvr>
     <a:masterClrMapping/>
   </p:clrMapOvr>
+  <p:transition spd="slow">
+    <p:wipe/>
+  </p:transition>
 </p:sld>
 </file>
 
